--- a/lectures/in-class_activities/class_7.pptx
+++ b/lectures/in-class_activities/class_7.pptx
@@ -15,7 +15,7 @@
     <p:sldId id="721" r:id="rId6"/>
     <p:sldId id="715" r:id="rId7"/>
     <p:sldId id="723" r:id="rId8"/>
-    <p:sldId id="724" r:id="rId9"/>
+    <p:sldId id="727" r:id="rId9"/>
     <p:sldId id="714" r:id="rId10"/>
     <p:sldId id="722" r:id="rId11"/>
   </p:sldIdLst>
@@ -206,7 +206,7 @@
           <a:p>
             <a:fld id="{6AC7DB66-C6D6-B24E-B345-FA3772C924EA}" type="datetimeFigureOut">
               <a:rPr lang="en-US" smtClean="0"/>
-              <a:t>10/28/20</a:t>
+              <a:t>10/13/25</a:t>
             </a:fld>
             <a:endParaRPr lang="en-US"/>
           </a:p>
@@ -557,6 +557,90 @@
 </p:notes>
 </file>
 
+<file path=ppt/notesSlides/notesSlide10.xml><?xml version="1.0" encoding="utf-8"?>
+<p:notes xmlns:a="http://schemas.openxmlformats.org/drawingml/2006/main" xmlns:r="http://schemas.openxmlformats.org/officeDocument/2006/relationships" xmlns:p="http://schemas.openxmlformats.org/presentationml/2006/main">
+  <p:cSld>
+    <p:spTree>
+      <p:nvGrpSpPr>
+        <p:cNvPr id="1" name=""/>
+        <p:cNvGrpSpPr/>
+        <p:nvPr/>
+      </p:nvGrpSpPr>
+      <p:grpSpPr>
+        <a:xfrm>
+          <a:off x="0" y="0"/>
+          <a:ext cx="0" cy="0"/>
+          <a:chOff x="0" y="0"/>
+          <a:chExt cx="0" cy="0"/>
+        </a:xfrm>
+      </p:grpSpPr>
+      <p:sp>
+        <p:nvSpPr>
+          <p:cNvPr id="2" name="Slide Image Placeholder 1"/>
+          <p:cNvSpPr>
+            <a:spLocks noGrp="1" noRot="1" noChangeAspect="1"/>
+          </p:cNvSpPr>
+          <p:nvPr>
+            <p:ph type="sldImg"/>
+          </p:nvPr>
+        </p:nvSpPr>
+        <p:spPr/>
+      </p:sp>
+      <p:sp>
+        <p:nvSpPr>
+          <p:cNvPr id="3" name="Notes Placeholder 2"/>
+          <p:cNvSpPr>
+            <a:spLocks noGrp="1"/>
+          </p:cNvSpPr>
+          <p:nvPr>
+            <p:ph type="body" idx="1"/>
+          </p:nvPr>
+        </p:nvSpPr>
+        <p:spPr/>
+        <p:txBody>
+          <a:bodyPr/>
+          <a:lstStyle/>
+          <a:p>
+            <a:endParaRPr lang="en-US"/>
+          </a:p>
+        </p:txBody>
+      </p:sp>
+      <p:sp>
+        <p:nvSpPr>
+          <p:cNvPr id="4" name="Slide Number Placeholder 3"/>
+          <p:cNvSpPr>
+            <a:spLocks noGrp="1"/>
+          </p:cNvSpPr>
+          <p:nvPr>
+            <p:ph type="sldNum" sz="quarter" idx="5"/>
+          </p:nvPr>
+        </p:nvSpPr>
+        <p:spPr/>
+        <p:txBody>
+          <a:bodyPr/>
+          <a:lstStyle/>
+          <a:p>
+            <a:fld id="{4218707C-A528-5347-B512-111D9A72273A}" type="slidenum">
+              <a:rPr lang="en-US" smtClean="0"/>
+              <a:t>10</a:t>
+            </a:fld>
+            <a:endParaRPr lang="en-US"/>
+          </a:p>
+        </p:txBody>
+      </p:sp>
+    </p:spTree>
+    <p:extLst>
+      <p:ext uri="{BB962C8B-B14F-4D97-AF65-F5344CB8AC3E}">
+        <p14:creationId xmlns:p14="http://schemas.microsoft.com/office/powerpoint/2010/main" val="753156717"/>
+      </p:ext>
+    </p:extLst>
+  </p:cSld>
+  <p:clrMapOvr>
+    <a:masterClrMapping/>
+  </p:clrMapOvr>
+</p:notes>
+</file>
+
 <file path=ppt/notesSlides/notesSlide2.xml><?xml version="1.0" encoding="utf-8"?>
 <p:notes xmlns:a="http://schemas.openxmlformats.org/drawingml/2006/main" xmlns:r="http://schemas.openxmlformats.org/officeDocument/2006/relationships" xmlns:p="http://schemas.openxmlformats.org/presentationml/2006/main">
   <p:cSld>
@@ -601,16 +685,7 @@
           <a:bodyPr/>
           <a:lstStyle/>
           <a:p>
-            <a:r>
-              <a:rPr lang="en-US"/>
-              <a:t>Point to the oldest proglottid.</a:t>
-            </a:r>
-          </a:p>
-          <a:p>
-            <a:r>
-              <a:rPr lang="en-US"/>
-              <a:t>https://www.polleverywhere.com/clickable_images/EQEMkeN9T71ynIOLZce9T</a:t>
-            </a:r>
+            <a:endParaRPr lang="en-US"/>
           </a:p>
         </p:txBody>
       </p:sp>
@@ -631,7 +706,7 @@
           <a:p>
             <a:fld id="{4218707C-A528-5347-B512-111D9A72273A}" type="slidenum">
               <a:rPr lang="en-US" smtClean="0"/>
-              <a:t>3</a:t>
+              <a:t>2</a:t>
             </a:fld>
             <a:endParaRPr lang="en-US"/>
           </a:p>
@@ -640,7 +715,7 @@
     </p:spTree>
     <p:extLst>
       <p:ext uri="{BB962C8B-B14F-4D97-AF65-F5344CB8AC3E}">
-        <p14:creationId xmlns:p14="http://schemas.microsoft.com/office/powerpoint/2010/main" val="592270731"/>
+        <p14:creationId xmlns:p14="http://schemas.microsoft.com/office/powerpoint/2010/main" val="1631488600"/>
       </p:ext>
     </p:extLst>
   </p:cSld>
@@ -696,13 +771,13 @@
           <a:p>
             <a:r>
               <a:rPr lang="en-US"/>
-              <a:t>Point to the digestive tract.</a:t>
-            </a:r>
-          </a:p>
-          <a:p>
-            <a:r>
-              <a:rPr lang="en-US"/>
-              <a:t>https://www.polleverywhere.com/clickable_images/dlHV7n50yg4G6HPOKxAW7</a:t>
+              <a:t>Point to the oldest proglottid.</a:t>
+            </a:r>
+          </a:p>
+          <a:p>
+            <a:r>
+              <a:rPr lang="en-US"/>
+              <a:t>https://www.polleverywhere.com/clickable_images/EQEMkeN9T71ynIOLZce9T</a:t>
             </a:r>
           </a:p>
         </p:txBody>
@@ -724,7 +799,7 @@
           <a:p>
             <a:fld id="{4218707C-A528-5347-B512-111D9A72273A}" type="slidenum">
               <a:rPr lang="en-US" smtClean="0"/>
-              <a:t>5</a:t>
+              <a:t>3</a:t>
             </a:fld>
             <a:endParaRPr lang="en-US"/>
           </a:p>
@@ -733,7 +808,7 @@
     </p:spTree>
     <p:extLst>
       <p:ext uri="{BB962C8B-B14F-4D97-AF65-F5344CB8AC3E}">
-        <p14:creationId xmlns:p14="http://schemas.microsoft.com/office/powerpoint/2010/main" val="518255355"/>
+        <p14:creationId xmlns:p14="http://schemas.microsoft.com/office/powerpoint/2010/main" val="592270731"/>
       </p:ext>
     </p:extLst>
   </p:cSld>
@@ -808,7 +883,7 @@
           <a:p>
             <a:fld id="{4218707C-A528-5347-B512-111D9A72273A}" type="slidenum">
               <a:rPr lang="en-US" smtClean="0"/>
-              <a:t>6</a:t>
+              <a:t>4</a:t>
             </a:fld>
             <a:endParaRPr lang="en-US"/>
           </a:p>
@@ -817,7 +892,7 @@
     </p:spTree>
     <p:extLst>
       <p:ext uri="{BB962C8B-B14F-4D97-AF65-F5344CB8AC3E}">
-        <p14:creationId xmlns:p14="http://schemas.microsoft.com/office/powerpoint/2010/main" val="2858645097"/>
+        <p14:creationId xmlns:p14="http://schemas.microsoft.com/office/powerpoint/2010/main" val="1544050583"/>
       </p:ext>
     </p:extLst>
   </p:cSld>
@@ -871,7 +946,16 @@
           <a:bodyPr/>
           <a:lstStyle/>
           <a:p>
-            <a:endParaRPr lang="en-US"/>
+            <a:r>
+              <a:rPr lang="en-US"/>
+              <a:t>Point to the digestive tract.</a:t>
+            </a:r>
+          </a:p>
+          <a:p>
+            <a:r>
+              <a:rPr lang="en-US"/>
+              <a:t>https://www.polleverywhere.com/clickable_images/dlHV7n50yg4G6HPOKxAW7</a:t>
+            </a:r>
           </a:p>
         </p:txBody>
       </p:sp>
@@ -892,7 +976,7 @@
           <a:p>
             <a:fld id="{4218707C-A528-5347-B512-111D9A72273A}" type="slidenum">
               <a:rPr lang="en-US" smtClean="0"/>
-              <a:t>7</a:t>
+              <a:t>5</a:t>
             </a:fld>
             <a:endParaRPr lang="en-US"/>
           </a:p>
@@ -901,7 +985,7 @@
     </p:spTree>
     <p:extLst>
       <p:ext uri="{BB962C8B-B14F-4D97-AF65-F5344CB8AC3E}">
-        <p14:creationId xmlns:p14="http://schemas.microsoft.com/office/powerpoint/2010/main" val="3753546872"/>
+        <p14:creationId xmlns:p14="http://schemas.microsoft.com/office/powerpoint/2010/main" val="518255355"/>
       </p:ext>
     </p:extLst>
   </p:cSld>
@@ -955,16 +1039,7 @@
           <a:bodyPr/>
           <a:lstStyle/>
           <a:p>
-            <a:r>
-              <a:rPr lang="en-US"/>
-              <a:t>Would you rather host an adult or a larval tapeworm? Why?</a:t>
-            </a:r>
-          </a:p>
-          <a:p>
-            <a:r>
-              <a:rPr lang="en-US"/>
-              <a:t>https://www.polleverywhere.com/discourses/FtkP0cIh2zy4AQp5qS0Vy</a:t>
-            </a:r>
+            <a:endParaRPr lang="en-US"/>
           </a:p>
         </p:txBody>
       </p:sp>
@@ -985,7 +1060,7 @@
           <a:p>
             <a:fld id="{4218707C-A528-5347-B512-111D9A72273A}" type="slidenum">
               <a:rPr lang="en-US" smtClean="0"/>
-              <a:t>8</a:t>
+              <a:t>6</a:t>
             </a:fld>
             <a:endParaRPr lang="en-US"/>
           </a:p>
@@ -994,7 +1069,7 @@
     </p:spTree>
     <p:extLst>
       <p:ext uri="{BB962C8B-B14F-4D97-AF65-F5344CB8AC3E}">
-        <p14:creationId xmlns:p14="http://schemas.microsoft.com/office/powerpoint/2010/main" val="619216529"/>
+        <p14:creationId xmlns:p14="http://schemas.microsoft.com/office/powerpoint/2010/main" val="2858645097"/>
       </p:ext>
     </p:extLst>
   </p:cSld>
@@ -1069,7 +1144,7 @@
           <a:p>
             <a:fld id="{4218707C-A528-5347-B512-111D9A72273A}" type="slidenum">
               <a:rPr lang="en-US" smtClean="0"/>
-              <a:t>9</a:t>
+              <a:t>7</a:t>
             </a:fld>
             <a:endParaRPr lang="en-US"/>
           </a:p>
@@ -1078,7 +1153,7 @@
     </p:spTree>
     <p:extLst>
       <p:ext uri="{BB962C8B-B14F-4D97-AF65-F5344CB8AC3E}">
-        <p14:creationId xmlns:p14="http://schemas.microsoft.com/office/powerpoint/2010/main" val="3214791753"/>
+        <p14:creationId xmlns:p14="http://schemas.microsoft.com/office/powerpoint/2010/main" val="3753546872"/>
       </p:ext>
     </p:extLst>
   </p:cSld>
@@ -1132,7 +1207,18 @@
           <a:bodyPr/>
           <a:lstStyle/>
           <a:p>
-            <a:endParaRPr lang="en-US"/>
+            <a:r>
+              <a:rPr lang="en-US"/>
+              <a:t>Do not modify the notes in this section to avoid tampering with the Poll Everywhere activity.
+More info at polleverywhere.com/support
+Would you rather host an adult or a larval tapeworm? Why?</a:t>
+            </a:r>
+          </a:p>
+          <a:p>
+            <a:r>
+              <a:rPr lang="en-US"/>
+              <a:t>https://www.polleverywhere.com/discourses/vBIAPqZVegpH4w7WjxPPm</a:t>
+            </a:r>
           </a:p>
         </p:txBody>
       </p:sp>
@@ -1153,7 +1239,7 @@
           <a:p>
             <a:fld id="{4218707C-A528-5347-B512-111D9A72273A}" type="slidenum">
               <a:rPr lang="en-US" smtClean="0"/>
-              <a:t>10</a:t>
+              <a:t>8</a:t>
             </a:fld>
             <a:endParaRPr lang="en-US"/>
           </a:p>
@@ -1162,7 +1248,91 @@
     </p:spTree>
     <p:extLst>
       <p:ext uri="{BB962C8B-B14F-4D97-AF65-F5344CB8AC3E}">
-        <p14:creationId xmlns:p14="http://schemas.microsoft.com/office/powerpoint/2010/main" val="753156717"/>
+        <p14:creationId xmlns:p14="http://schemas.microsoft.com/office/powerpoint/2010/main" val="351607553"/>
+      </p:ext>
+    </p:extLst>
+  </p:cSld>
+  <p:clrMapOvr>
+    <a:masterClrMapping/>
+  </p:clrMapOvr>
+</p:notes>
+</file>
+
+<file path=ppt/notesSlides/notesSlide9.xml><?xml version="1.0" encoding="utf-8"?>
+<p:notes xmlns:a="http://schemas.openxmlformats.org/drawingml/2006/main" xmlns:r="http://schemas.openxmlformats.org/officeDocument/2006/relationships" xmlns:p="http://schemas.openxmlformats.org/presentationml/2006/main">
+  <p:cSld>
+    <p:spTree>
+      <p:nvGrpSpPr>
+        <p:cNvPr id="1" name=""/>
+        <p:cNvGrpSpPr/>
+        <p:nvPr/>
+      </p:nvGrpSpPr>
+      <p:grpSpPr>
+        <a:xfrm>
+          <a:off x="0" y="0"/>
+          <a:ext cx="0" cy="0"/>
+          <a:chOff x="0" y="0"/>
+          <a:chExt cx="0" cy="0"/>
+        </a:xfrm>
+      </p:grpSpPr>
+      <p:sp>
+        <p:nvSpPr>
+          <p:cNvPr id="2" name="Slide Image Placeholder 1"/>
+          <p:cNvSpPr>
+            <a:spLocks noGrp="1" noRot="1" noChangeAspect="1"/>
+          </p:cNvSpPr>
+          <p:nvPr>
+            <p:ph type="sldImg"/>
+          </p:nvPr>
+        </p:nvSpPr>
+        <p:spPr/>
+      </p:sp>
+      <p:sp>
+        <p:nvSpPr>
+          <p:cNvPr id="3" name="Notes Placeholder 2"/>
+          <p:cNvSpPr>
+            <a:spLocks noGrp="1"/>
+          </p:cNvSpPr>
+          <p:nvPr>
+            <p:ph type="body" idx="1"/>
+          </p:nvPr>
+        </p:nvSpPr>
+        <p:spPr/>
+        <p:txBody>
+          <a:bodyPr/>
+          <a:lstStyle/>
+          <a:p>
+            <a:endParaRPr lang="en-US"/>
+          </a:p>
+        </p:txBody>
+      </p:sp>
+      <p:sp>
+        <p:nvSpPr>
+          <p:cNvPr id="4" name="Slide Number Placeholder 3"/>
+          <p:cNvSpPr>
+            <a:spLocks noGrp="1"/>
+          </p:cNvSpPr>
+          <p:nvPr>
+            <p:ph type="sldNum" sz="quarter" idx="5"/>
+          </p:nvPr>
+        </p:nvSpPr>
+        <p:spPr/>
+        <p:txBody>
+          <a:bodyPr/>
+          <a:lstStyle/>
+          <a:p>
+            <a:fld id="{4218707C-A528-5347-B512-111D9A72273A}" type="slidenum">
+              <a:rPr lang="en-US" smtClean="0"/>
+              <a:t>9</a:t>
+            </a:fld>
+            <a:endParaRPr lang="en-US"/>
+          </a:p>
+        </p:txBody>
+      </p:sp>
+    </p:spTree>
+    <p:extLst>
+      <p:ext uri="{BB962C8B-B14F-4D97-AF65-F5344CB8AC3E}">
+        <p14:creationId xmlns:p14="http://schemas.microsoft.com/office/powerpoint/2010/main" val="3214791753"/>
       </p:ext>
     </p:extLst>
   </p:cSld>
@@ -1319,7 +1489,7 @@
           <a:p>
             <a:fld id="{21DDE3A9-9D48-7D40-AF95-520AE186EA5D}" type="datetimeFigureOut">
               <a:rPr lang="en-US" smtClean="0"/>
-              <a:t>10/28/20</a:t>
+              <a:t>10/13/25</a:t>
             </a:fld>
             <a:endParaRPr lang="en-US"/>
           </a:p>
@@ -1517,7 +1687,7 @@
           <a:p>
             <a:fld id="{21DDE3A9-9D48-7D40-AF95-520AE186EA5D}" type="datetimeFigureOut">
               <a:rPr lang="en-US" smtClean="0"/>
-              <a:t>10/28/20</a:t>
+              <a:t>10/13/25</a:t>
             </a:fld>
             <a:endParaRPr lang="en-US"/>
           </a:p>
@@ -1725,7 +1895,7 @@
           <a:p>
             <a:fld id="{21DDE3A9-9D48-7D40-AF95-520AE186EA5D}" type="datetimeFigureOut">
               <a:rPr lang="en-US" smtClean="0"/>
-              <a:t>10/28/20</a:t>
+              <a:t>10/13/25</a:t>
             </a:fld>
             <a:endParaRPr lang="en-US"/>
           </a:p>
@@ -1923,7 +2093,7 @@
           <a:p>
             <a:fld id="{21DDE3A9-9D48-7D40-AF95-520AE186EA5D}" type="datetimeFigureOut">
               <a:rPr lang="en-US" smtClean="0"/>
-              <a:t>10/28/20</a:t>
+              <a:t>10/13/25</a:t>
             </a:fld>
             <a:endParaRPr lang="en-US"/>
           </a:p>
@@ -2198,7 +2368,7 @@
           <a:p>
             <a:fld id="{21DDE3A9-9D48-7D40-AF95-520AE186EA5D}" type="datetimeFigureOut">
               <a:rPr lang="en-US" smtClean="0"/>
-              <a:t>10/28/20</a:t>
+              <a:t>10/13/25</a:t>
             </a:fld>
             <a:endParaRPr lang="en-US"/>
           </a:p>
@@ -2463,7 +2633,7 @@
           <a:p>
             <a:fld id="{21DDE3A9-9D48-7D40-AF95-520AE186EA5D}" type="datetimeFigureOut">
               <a:rPr lang="en-US" smtClean="0"/>
-              <a:t>10/28/20</a:t>
+              <a:t>10/13/25</a:t>
             </a:fld>
             <a:endParaRPr lang="en-US"/>
           </a:p>
@@ -2875,7 +3045,7 @@
           <a:p>
             <a:fld id="{21DDE3A9-9D48-7D40-AF95-520AE186EA5D}" type="datetimeFigureOut">
               <a:rPr lang="en-US" smtClean="0"/>
-              <a:t>10/28/20</a:t>
+              <a:t>10/13/25</a:t>
             </a:fld>
             <a:endParaRPr lang="en-US"/>
           </a:p>
@@ -3016,7 +3186,7 @@
           <a:p>
             <a:fld id="{21DDE3A9-9D48-7D40-AF95-520AE186EA5D}" type="datetimeFigureOut">
               <a:rPr lang="en-US" smtClean="0"/>
-              <a:t>10/28/20</a:t>
+              <a:t>10/13/25</a:t>
             </a:fld>
             <a:endParaRPr lang="en-US"/>
           </a:p>
@@ -3129,7 +3299,7 @@
           <a:p>
             <a:fld id="{21DDE3A9-9D48-7D40-AF95-520AE186EA5D}" type="datetimeFigureOut">
               <a:rPr lang="en-US" smtClean="0"/>
-              <a:t>10/28/20</a:t>
+              <a:t>10/13/25</a:t>
             </a:fld>
             <a:endParaRPr lang="en-US"/>
           </a:p>
@@ -3440,7 +3610,7 @@
           <a:p>
             <a:fld id="{21DDE3A9-9D48-7D40-AF95-520AE186EA5D}" type="datetimeFigureOut">
               <a:rPr lang="en-US" smtClean="0"/>
-              <a:t>10/28/20</a:t>
+              <a:t>10/13/25</a:t>
             </a:fld>
             <a:endParaRPr lang="en-US"/>
           </a:p>
@@ -3728,7 +3898,7 @@
           <a:p>
             <a:fld id="{21DDE3A9-9D48-7D40-AF95-520AE186EA5D}" type="datetimeFigureOut">
               <a:rPr lang="en-US" smtClean="0"/>
-              <a:t>10/28/20</a:t>
+              <a:t>10/13/25</a:t>
             </a:fld>
             <a:endParaRPr lang="en-US"/>
           </a:p>
@@ -3969,7 +4139,7 @@
           <a:p>
             <a:fld id="{21DDE3A9-9D48-7D40-AF95-520AE186EA5D}" type="datetimeFigureOut">
               <a:rPr lang="en-US" smtClean="0"/>
-              <a:t>10/28/20</a:t>
+              <a:t>10/13/25</a:t>
             </a:fld>
             <a:endParaRPr lang="en-US"/>
           </a:p>
@@ -4436,9 +4606,9 @@
                   </a:schemeClr>
                 </a:solidFill>
                 <a:latin typeface="Avenir Book" panose="02000503020000020003" pitchFamily="2" charset="0"/>
-                <a:cs typeface="Avenir Roman"/>
+                <a:cs typeface="Avenir"/>
               </a:rPr>
-              <a:t>Practical session 7</a:t>
+              <a:t>Class 7</a:t>
             </a:r>
             <a:r>
               <a:rPr lang="en-US" sz="4800" dirty="0">
@@ -4448,7 +4618,7 @@
                   </a:schemeClr>
                 </a:solidFill>
                 <a:latin typeface="Avenir Book" panose="02000503020000020003" pitchFamily="2" charset="0"/>
-                <a:cs typeface="Avenir Roman"/>
+                <a:cs typeface="Avenir"/>
               </a:rPr>
               <a:t>: </a:t>
             </a:r>
@@ -4458,7 +4628,7 @@
                   <a:srgbClr val="FFFFFF"/>
                 </a:solidFill>
                 <a:latin typeface="Avenir Book" panose="02000503020000020003" pitchFamily="2" charset="0"/>
-                <a:cs typeface="Avenir Roman"/>
+                <a:cs typeface="Avenir"/>
               </a:rPr>
               <a:t>Cestodes 1</a:t>
             </a:r>
@@ -4545,9 +4715,9 @@
                   </a:schemeClr>
                 </a:solidFill>
                 <a:latin typeface="Avenir Book" panose="02000503020000020003" pitchFamily="2" charset="0"/>
-                <a:cs typeface="Avenir Roman"/>
+                <a:cs typeface="Avenir"/>
               </a:rPr>
-              <a:t>Practical session 7</a:t>
+              <a:t>Class 7</a:t>
             </a:r>
             <a:r>
               <a:rPr lang="en-US" sz="4800" dirty="0">
@@ -4557,7 +4727,7 @@
                   </a:schemeClr>
                 </a:solidFill>
                 <a:latin typeface="Avenir Book" panose="02000503020000020003" pitchFamily="2" charset="0"/>
-                <a:cs typeface="Avenir Roman"/>
+                <a:cs typeface="Avenir"/>
               </a:rPr>
               <a:t>: </a:t>
             </a:r>
@@ -4567,7 +4737,7 @@
                   <a:srgbClr val="FFFFFF"/>
                 </a:solidFill>
                 <a:latin typeface="Avenir Book" panose="02000503020000020003" pitchFamily="2" charset="0"/>
-                <a:cs typeface="Avenir Roman"/>
+                <a:cs typeface="Avenir"/>
               </a:rPr>
               <a:t>Cestodes 1</a:t>
             </a:r>
@@ -4640,8 +4810,8 @@
             </a:pPr>
             <a:r>
               <a:rPr lang="en-US" sz="4000" b="1" dirty="0">
-                <a:latin typeface="Avenir Roman"/>
-                <a:cs typeface="Avenir Roman"/>
+                <a:latin typeface="Avenir"/>
+                <a:cs typeface="Avenir"/>
               </a:rPr>
               <a:t>Q1. point to the oldest proglottid</a:t>
             </a:r>
@@ -4663,7 +4833,7 @@
           <p:nvPr/>
         </p:nvPicPr>
         <p:blipFill>
-          <a:blip r:embed="rId2"/>
+          <a:blip r:embed="rId3"/>
           <a:stretch>
             <a:fillRect/>
           </a:stretch>
@@ -4854,8 +5024,8 @@
             </a:pPr>
             <a:r>
               <a:rPr lang="en-US" sz="4000" b="1" dirty="0">
-                <a:latin typeface="Avenir Roman"/>
-                <a:cs typeface="Avenir Roman"/>
+                <a:latin typeface="Avenir"/>
+                <a:cs typeface="Avenir"/>
               </a:rPr>
               <a:t>Q2. point to the digestive tract</a:t>
             </a:r>
@@ -4877,7 +5047,7 @@
           <p:nvPr/>
         </p:nvPicPr>
         <p:blipFill>
-          <a:blip r:embed="rId2"/>
+          <a:blip r:embed="rId3"/>
           <a:stretch>
             <a:fillRect/>
           </a:stretch>
@@ -5074,8 +5244,8 @@
             </a:pPr>
             <a:r>
               <a:rPr lang="en-US" sz="3500" b="1" dirty="0">
-                <a:latin typeface="Avenir Roman"/>
-                <a:cs typeface="Avenir Roman"/>
+                <a:latin typeface="Avenir"/>
+                <a:cs typeface="Avenir"/>
               </a:rPr>
               <a:t>Q3. the vertebrate gut as habitat</a:t>
             </a:r>
@@ -5121,14 +5291,14 @@
           </a:ln>
           <a:extLst>
             <a:ext uri="{909E8E84-426E-40dd-AFC4-6F175D3DCCD1}">
-              <a14:hiddenFill xmlns:a14="http://schemas.microsoft.com/office/drawing/2010/main" xmlns="">
+              <a14:hiddenFill xmlns="" xmlns:a14="http://schemas.microsoft.com/office/drawing/2010/main">
                 <a:solidFill>
                   <a:srgbClr val="FFFFFF"/>
                 </a:solidFill>
               </a14:hiddenFill>
             </a:ext>
             <a:ext uri="{91240B29-F687-4f45-9708-019B960494DF}">
-              <a14:hiddenLine xmlns:a14="http://schemas.microsoft.com/office/drawing/2010/main" xmlns="" w="9525">
+              <a14:hiddenLine xmlns="" xmlns:a14="http://schemas.microsoft.com/office/drawing/2010/main" w="9525">
                 <a:solidFill>
                   <a:srgbClr val="000000"/>
                 </a:solidFill>
@@ -5212,8 +5382,8 @@
             </a:pPr>
             <a:r>
               <a:rPr lang="en-US" sz="3500" b="1" dirty="0">
-                <a:latin typeface="Avenir Roman"/>
-                <a:cs typeface="Avenir Roman"/>
+                <a:latin typeface="Avenir"/>
+                <a:cs typeface="Avenir"/>
               </a:rPr>
               <a:t>Q3. the vertebrate gut as habitat</a:t>
             </a:r>
@@ -5259,14 +5429,14 @@
           </a:ln>
           <a:extLst>
             <a:ext uri="{909E8E84-426E-40dd-AFC4-6F175D3DCCD1}">
-              <a14:hiddenFill xmlns:a14="http://schemas.microsoft.com/office/drawing/2010/main" xmlns="">
+              <a14:hiddenFill xmlns="" xmlns:a14="http://schemas.microsoft.com/office/drawing/2010/main">
                 <a:solidFill>
                   <a:srgbClr val="FFFFFF"/>
                 </a:solidFill>
               </a14:hiddenFill>
             </a:ext>
             <a:ext uri="{91240B29-F687-4f45-9708-019B960494DF}">
-              <a14:hiddenLine xmlns:a14="http://schemas.microsoft.com/office/drawing/2010/main" xmlns="" w="9525">
+              <a14:hiddenLine xmlns="" xmlns:a14="http://schemas.microsoft.com/office/drawing/2010/main" w="9525">
                 <a:solidFill>
                   <a:srgbClr val="000000"/>
                 </a:solidFill>
@@ -5320,8 +5490,8 @@
             </a:pPr>
             <a:r>
               <a:rPr lang="en-US" sz="3600" dirty="0">
-                <a:latin typeface="Avenir Roman"/>
-                <a:cs typeface="Avenir Roman"/>
+                <a:latin typeface="Avenir"/>
+                <a:cs typeface="Avenir"/>
               </a:rPr>
               <a:t>Imagine you are a tapeworm. Where would you choose to live and why?</a:t>
             </a:r>
@@ -5370,8 +5540,8 @@
             </a:pPr>
             <a:r>
               <a:rPr lang="en-US" sz="3000" b="1" dirty="0">
-                <a:latin typeface="Avenir Roman"/>
-                <a:cs typeface="Avenir Roman"/>
+                <a:latin typeface="Avenir"/>
+                <a:cs typeface="Avenir"/>
               </a:rPr>
               <a:t>Ponder on your own (5 m), discuss with a group (5 m), then share with the class (5 m).</a:t>
             </a:r>
@@ -5591,7 +5761,7 @@
           <p:cNvPr id="2" name="Title 1">
             <a:extLst>
               <a:ext uri="{FF2B5EF4-FFF2-40B4-BE49-F238E27FC236}">
-                <a16:creationId xmlns:a16="http://schemas.microsoft.com/office/drawing/2014/main" id="{16B08D34-3E17-0F41-9E1D-6F174B2DF630}"/>
+                <a16:creationId xmlns:a16="http://schemas.microsoft.com/office/drawing/2014/main" id="{6EDBBA59-19ED-125B-C1FB-F938072BCB3D}"/>
               </a:ext>
             </a:extLst>
           </p:cNvPr>
@@ -5616,7 +5786,7 @@
           <p:cNvPr id="3" name="Subtitle 2">
             <a:extLst>
               <a:ext uri="{FF2B5EF4-FFF2-40B4-BE49-F238E27FC236}">
-                <a16:creationId xmlns:a16="http://schemas.microsoft.com/office/drawing/2014/main" id="{BE6F46FC-B2B8-BF47-AC5F-D29E972BD7B0}"/>
+                <a16:creationId xmlns:a16="http://schemas.microsoft.com/office/drawing/2014/main" id="{5EA8563E-5811-FDB0-0E87-277E60C6F687}"/>
               </a:ext>
             </a:extLst>
           </p:cNvPr>
@@ -5638,10 +5808,10 @@
       </p:sp>
       <p:pic>
         <p:nvPicPr>
-          <p:cNvPr id="5" name="slide.url=https://www.polleverywhere.com/discourses/FtkP0cIh2zy4AQp5qS0Vy">
-            <a:extLst>
-              <a:ext uri="{FF2B5EF4-FFF2-40B4-BE49-F238E27FC236}">
-                <a16:creationId xmlns:a16="http://schemas.microsoft.com/office/drawing/2014/main" id="{72911D54-193D-0A41-924C-F4132171B2D0}"/>
+          <p:cNvPr id="5" name="slide.url=https://www.polleverywhere.com/discourses/vBIAPqZVegpH4w7WjxPPm">
+            <a:extLst>
+              <a:ext uri="{FF2B5EF4-FFF2-40B4-BE49-F238E27FC236}">
+                <a16:creationId xmlns:a16="http://schemas.microsoft.com/office/drawing/2014/main" id="{9AE11D0E-408A-EDE2-F405-4102AF670B87}"/>
               </a:ext>
             </a:extLst>
           </p:cNvPr>
@@ -5669,7 +5839,7 @@
     </p:spTree>
     <p:extLst>
       <p:ext uri="{BB962C8B-B14F-4D97-AF65-F5344CB8AC3E}">
-        <p14:creationId xmlns:p14="http://schemas.microsoft.com/office/powerpoint/2010/main" val="4025292697"/>
+        <p14:creationId xmlns:p14="http://schemas.microsoft.com/office/powerpoint/2010/main" val="2197502836"/>
       </p:ext>
     </p:extLst>
   </p:cSld>
@@ -5732,8 +5902,8 @@
             </a:pPr>
             <a:r>
               <a:rPr lang="en-US" sz="3500" b="1" dirty="0">
-                <a:latin typeface="Avenir Roman"/>
-                <a:cs typeface="Avenir Roman"/>
+                <a:latin typeface="Avenir"/>
+                <a:cs typeface="Avenir"/>
               </a:rPr>
               <a:t>Q5. crowding effects?</a:t>
             </a:r>
@@ -5872,29 +6042,29 @@
             </a:pPr>
             <a:r>
               <a:rPr lang="en-US" sz="2000" dirty="0">
-                <a:latin typeface="Avenir Roman"/>
-                <a:cs typeface="Avenir Roman"/>
+                <a:latin typeface="Avenir"/>
+                <a:cs typeface="Avenir"/>
               </a:rPr>
               <a:t>A coroner keeps track of the distributions of two (made-up) tapeworms that occupy the intestines of bodies sent for autopsy. She counts the number of tapeworms with </a:t>
             </a:r>
             <a:r>
               <a:rPr lang="en-US" sz="2000" dirty="0" err="1">
-                <a:latin typeface="Avenir Roman"/>
-                <a:cs typeface="Avenir Roman"/>
+                <a:latin typeface="Avenir"/>
+                <a:cs typeface="Avenir"/>
               </a:rPr>
               <a:t>scolices</a:t>
             </a:r>
             <a:r>
               <a:rPr lang="en-US" sz="2000" dirty="0">
-                <a:latin typeface="Avenir Roman"/>
-                <a:cs typeface="Avenir Roman"/>
+                <a:latin typeface="Avenir"/>
+                <a:cs typeface="Avenir"/>
               </a:rPr>
               <a:t> attached in different sections of the intestinal tract (jejunum -&gt; ileum -&gt; ascending colon -&gt; transverse colon -&gt;descending colon). The table shows the distribution of worms she recovers. </a:t>
             </a:r>
             <a:r>
               <a:rPr lang="en-US" sz="2000" b="1" dirty="0">
-                <a:latin typeface="Avenir Roman"/>
-                <a:cs typeface="Avenir Roman"/>
+                <a:latin typeface="Avenir"/>
+                <a:cs typeface="Avenir"/>
               </a:rPr>
               <a:t>Is there evidence for interspecific competition?</a:t>
             </a:r>
@@ -5972,8 +6142,8 @@
             </a:pPr>
             <a:r>
               <a:rPr lang="en-US" sz="3000" b="1" dirty="0">
-                <a:latin typeface="Avenir Roman"/>
-                <a:cs typeface="Avenir Roman"/>
+                <a:latin typeface="Avenir"/>
+                <a:cs typeface="Avenir"/>
               </a:rPr>
               <a:t>Ponder on your own (5 m), discuss with a partner (5 m), then share with the class (5 m).</a:t>
             </a:r>

--- a/lectures/in-class_activities/class_7.pptx
+++ b/lectures/in-class_activities/class_7.pptx
@@ -5,7 +5,7 @@
     <p:sldMasterId id="2147483648" r:id="rId1"/>
   </p:sldMasterIdLst>
   <p:notesMasterIdLst>
-    <p:notesMasterId r:id="rId12"/>
+    <p:notesMasterId r:id="rId13"/>
   </p:notesMasterIdLst>
   <p:sldIdLst>
     <p:sldId id="480" r:id="rId2"/>
@@ -15,9 +15,10 @@
     <p:sldId id="721" r:id="rId6"/>
     <p:sldId id="715" r:id="rId7"/>
     <p:sldId id="723" r:id="rId8"/>
-    <p:sldId id="727" r:id="rId9"/>
-    <p:sldId id="714" r:id="rId10"/>
-    <p:sldId id="722" r:id="rId11"/>
+    <p:sldId id="728" r:id="rId9"/>
+    <p:sldId id="727" r:id="rId10"/>
+    <p:sldId id="714" r:id="rId11"/>
+    <p:sldId id="722" r:id="rId12"/>
   </p:sldIdLst>
   <p:sldSz cx="12192000" cy="6858000"/>
   <p:notesSz cx="6858000" cy="9144000"/>
@@ -631,6 +632,90 @@
     </p:spTree>
     <p:extLst>
       <p:ext uri="{BB962C8B-B14F-4D97-AF65-F5344CB8AC3E}">
+        <p14:creationId xmlns:p14="http://schemas.microsoft.com/office/powerpoint/2010/main" val="3214791753"/>
+      </p:ext>
+    </p:extLst>
+  </p:cSld>
+  <p:clrMapOvr>
+    <a:masterClrMapping/>
+  </p:clrMapOvr>
+</p:notes>
+</file>
+
+<file path=ppt/notesSlides/notesSlide11.xml><?xml version="1.0" encoding="utf-8"?>
+<p:notes xmlns:a="http://schemas.openxmlformats.org/drawingml/2006/main" xmlns:r="http://schemas.openxmlformats.org/officeDocument/2006/relationships" xmlns:p="http://schemas.openxmlformats.org/presentationml/2006/main">
+  <p:cSld>
+    <p:spTree>
+      <p:nvGrpSpPr>
+        <p:cNvPr id="1" name=""/>
+        <p:cNvGrpSpPr/>
+        <p:nvPr/>
+      </p:nvGrpSpPr>
+      <p:grpSpPr>
+        <a:xfrm>
+          <a:off x="0" y="0"/>
+          <a:ext cx="0" cy="0"/>
+          <a:chOff x="0" y="0"/>
+          <a:chExt cx="0" cy="0"/>
+        </a:xfrm>
+      </p:grpSpPr>
+      <p:sp>
+        <p:nvSpPr>
+          <p:cNvPr id="2" name="Slide Image Placeholder 1"/>
+          <p:cNvSpPr>
+            <a:spLocks noGrp="1" noRot="1" noChangeAspect="1"/>
+          </p:cNvSpPr>
+          <p:nvPr>
+            <p:ph type="sldImg"/>
+          </p:nvPr>
+        </p:nvSpPr>
+        <p:spPr/>
+      </p:sp>
+      <p:sp>
+        <p:nvSpPr>
+          <p:cNvPr id="3" name="Notes Placeholder 2"/>
+          <p:cNvSpPr>
+            <a:spLocks noGrp="1"/>
+          </p:cNvSpPr>
+          <p:nvPr>
+            <p:ph type="body" idx="1"/>
+          </p:nvPr>
+        </p:nvSpPr>
+        <p:spPr/>
+        <p:txBody>
+          <a:bodyPr/>
+          <a:lstStyle/>
+          <a:p>
+            <a:endParaRPr lang="en-US"/>
+          </a:p>
+        </p:txBody>
+      </p:sp>
+      <p:sp>
+        <p:nvSpPr>
+          <p:cNvPr id="4" name="Slide Number Placeholder 3"/>
+          <p:cNvSpPr>
+            <a:spLocks noGrp="1"/>
+          </p:cNvSpPr>
+          <p:nvPr>
+            <p:ph type="sldNum" sz="quarter" idx="5"/>
+          </p:nvPr>
+        </p:nvSpPr>
+        <p:spPr/>
+        <p:txBody>
+          <a:bodyPr/>
+          <a:lstStyle/>
+          <a:p>
+            <a:fld id="{4218707C-A528-5347-B512-111D9A72273A}" type="slidenum">
+              <a:rPr lang="en-US" smtClean="0"/>
+              <a:t>11</a:t>
+            </a:fld>
+            <a:endParaRPr lang="en-US"/>
+          </a:p>
+        </p:txBody>
+      </p:sp>
+    </p:spTree>
+    <p:extLst>
+      <p:ext uri="{BB962C8B-B14F-4D97-AF65-F5344CB8AC3E}">
         <p14:creationId xmlns:p14="http://schemas.microsoft.com/office/powerpoint/2010/main" val="753156717"/>
       </p:ext>
     </p:extLst>
@@ -1168,7 +1253,13 @@
   <p:cSld>
     <p:spTree>
       <p:nvGrpSpPr>
-        <p:cNvPr id="1" name=""/>
+        <p:cNvPr id="1" name="">
+          <a:extLst>
+            <a:ext uri="{FF2B5EF4-FFF2-40B4-BE49-F238E27FC236}">
+              <a16:creationId xmlns:a16="http://schemas.microsoft.com/office/drawing/2014/main" id="{6121D8D8-1773-E03F-15EB-5C41C181C251}"/>
+            </a:ext>
+          </a:extLst>
+        </p:cNvPr>
         <p:cNvGrpSpPr/>
         <p:nvPr/>
       </p:nvGrpSpPr>
@@ -1182,7 +1273,13 @@
       </p:grpSpPr>
       <p:sp>
         <p:nvSpPr>
-          <p:cNvPr id="2" name="Slide Image Placeholder 1"/>
+          <p:cNvPr id="2" name="Slide Image Placeholder 1">
+            <a:extLst>
+              <a:ext uri="{FF2B5EF4-FFF2-40B4-BE49-F238E27FC236}">
+                <a16:creationId xmlns:a16="http://schemas.microsoft.com/office/drawing/2014/main" id="{71F61712-75FC-2EB2-F987-8B42B288DBB8}"/>
+              </a:ext>
+            </a:extLst>
+          </p:cNvPr>
           <p:cNvSpPr>
             <a:spLocks noGrp="1" noRot="1" noChangeAspect="1"/>
           </p:cNvSpPr>
@@ -1194,7 +1291,13 @@
       </p:sp>
       <p:sp>
         <p:nvSpPr>
-          <p:cNvPr id="3" name="Notes Placeholder 2"/>
+          <p:cNvPr id="3" name="Notes Placeholder 2">
+            <a:extLst>
+              <a:ext uri="{FF2B5EF4-FFF2-40B4-BE49-F238E27FC236}">
+                <a16:creationId xmlns:a16="http://schemas.microsoft.com/office/drawing/2014/main" id="{231E55EE-D1B0-AA67-242A-6EF313D74826}"/>
+              </a:ext>
+            </a:extLst>
+          </p:cNvPr>
           <p:cNvSpPr>
             <a:spLocks noGrp="1"/>
           </p:cNvSpPr>
@@ -1207,24 +1310,19 @@
           <a:bodyPr/>
           <a:lstStyle/>
           <a:p>
-            <a:r>
-              <a:rPr lang="en-US"/>
-              <a:t>Do not modify the notes in this section to avoid tampering with the Poll Everywhere activity.
-More info at polleverywhere.com/support
-Would you rather host an adult or a larval tapeworm? Why?</a:t>
-            </a:r>
-          </a:p>
-          <a:p>
-            <a:r>
-              <a:rPr lang="en-US"/>
-              <a:t>https://www.polleverywhere.com/discourses/vBIAPqZVegpH4w7WjxPPm</a:t>
-            </a:r>
-          </a:p>
-        </p:txBody>
-      </p:sp>
-      <p:sp>
-        <p:nvSpPr>
-          <p:cNvPr id="4" name="Slide Number Placeholder 3"/>
+            <a:endParaRPr lang="en-US"/>
+          </a:p>
+        </p:txBody>
+      </p:sp>
+      <p:sp>
+        <p:nvSpPr>
+          <p:cNvPr id="4" name="Slide Number Placeholder 3">
+            <a:extLst>
+              <a:ext uri="{FF2B5EF4-FFF2-40B4-BE49-F238E27FC236}">
+                <a16:creationId xmlns:a16="http://schemas.microsoft.com/office/drawing/2014/main" id="{C0713B5B-4977-68AA-8486-A3E38D9BEE80}"/>
+              </a:ext>
+            </a:extLst>
+          </p:cNvPr>
           <p:cNvSpPr>
             <a:spLocks noGrp="1"/>
           </p:cNvSpPr>
@@ -1248,7 +1346,7 @@
     </p:spTree>
     <p:extLst>
       <p:ext uri="{BB962C8B-B14F-4D97-AF65-F5344CB8AC3E}">
-        <p14:creationId xmlns:p14="http://schemas.microsoft.com/office/powerpoint/2010/main" val="351607553"/>
+        <p14:creationId xmlns:p14="http://schemas.microsoft.com/office/powerpoint/2010/main" val="226359822"/>
       </p:ext>
     </p:extLst>
   </p:cSld>
@@ -1302,7 +1400,18 @@
           <a:bodyPr/>
           <a:lstStyle/>
           <a:p>
-            <a:endParaRPr lang="en-US"/>
+            <a:r>
+              <a:rPr lang="en-US"/>
+              <a:t>Do not modify the notes in this section to avoid tampering with the Poll Everywhere activity.
+More info at polleverywhere.com/support
+Would you rather host an adult or a larval tapeworm? Why?</a:t>
+            </a:r>
+          </a:p>
+          <a:p>
+            <a:r>
+              <a:rPr lang="en-US"/>
+              <a:t>https://www.polleverywhere.com/discourses/vBIAPqZVegpH4w7WjxPPm</a:t>
+            </a:r>
           </a:p>
         </p:txBody>
       </p:sp>
@@ -1332,7 +1441,7 @@
     </p:spTree>
     <p:extLst>
       <p:ext uri="{BB962C8B-B14F-4D97-AF65-F5344CB8AC3E}">
-        <p14:creationId xmlns:p14="http://schemas.microsoft.com/office/powerpoint/2010/main" val="3214791753"/>
+        <p14:creationId xmlns:p14="http://schemas.microsoft.com/office/powerpoint/2010/main" val="351607553"/>
       </p:ext>
     </p:extLst>
   </p:cSld>
@@ -4651,6 +4760,402 @@
 <file path=ppt/slides/slide10.xml><?xml version="1.0" encoding="utf-8"?>
 <p:sld xmlns:a="http://schemas.openxmlformats.org/drawingml/2006/main" xmlns:r="http://schemas.openxmlformats.org/officeDocument/2006/relationships" xmlns:p="http://schemas.openxmlformats.org/presentationml/2006/main">
   <p:cSld>
+    <p:spTree>
+      <p:nvGrpSpPr>
+        <p:cNvPr id="1" name=""/>
+        <p:cNvGrpSpPr/>
+        <p:nvPr/>
+      </p:nvGrpSpPr>
+      <p:grpSpPr>
+        <a:xfrm>
+          <a:off x="0" y="0"/>
+          <a:ext cx="0" cy="0"/>
+          <a:chOff x="0" y="0"/>
+          <a:chExt cx="0" cy="0"/>
+        </a:xfrm>
+      </p:grpSpPr>
+      <p:sp>
+        <p:nvSpPr>
+          <p:cNvPr id="3" name="Rectangle 2"/>
+          <p:cNvSpPr>
+            <a:spLocks noChangeArrowheads="1"/>
+          </p:cNvSpPr>
+          <p:nvPr/>
+        </p:nvSpPr>
+        <p:spPr bwMode="auto">
+          <a:xfrm>
+            <a:off x="271470" y="190858"/>
+            <a:ext cx="11649060" cy="630942"/>
+          </a:xfrm>
+          <a:prstGeom prst="rect">
+            <a:avLst/>
+          </a:prstGeom>
+          <a:noFill/>
+          <a:ln w="9525">
+            <a:noFill/>
+            <a:miter lim="800000"/>
+            <a:headEnd/>
+            <a:tailEnd/>
+          </a:ln>
+          <a:effectLst/>
+        </p:spPr>
+        <p:txBody>
+          <a:bodyPr wrap="square">
+            <a:spAutoFit/>
+          </a:bodyPr>
+          <a:lstStyle/>
+          <a:p>
+            <a:pPr algn="ctr">
+              <a:defRPr/>
+            </a:pPr>
+            <a:r>
+              <a:rPr lang="en-US" sz="3500" b="1" dirty="0">
+                <a:latin typeface="Avenir"/>
+                <a:cs typeface="Avenir"/>
+              </a:rPr>
+              <a:t>Q5. crowding effects?</a:t>
+            </a:r>
+          </a:p>
+        </p:txBody>
+      </p:sp>
+      <p:pic>
+        <p:nvPicPr>
+          <p:cNvPr id="6" name="Picture 5">
+            <a:extLst>
+              <a:ext uri="{FF2B5EF4-FFF2-40B4-BE49-F238E27FC236}">
+                <a16:creationId xmlns:a16="http://schemas.microsoft.com/office/drawing/2014/main" id="{24C76115-8B07-BF49-9DDC-5F3B697CE12E}"/>
+              </a:ext>
+            </a:extLst>
+          </p:cNvPr>
+          <p:cNvPicPr>
+            <a:picLocks noChangeAspect="1"/>
+          </p:cNvPicPr>
+          <p:nvPr/>
+        </p:nvPicPr>
+        <p:blipFill>
+          <a:blip r:embed="rId3">
+            <a:extLst>
+              <a:ext uri="{BEBA8EAE-BF5A-486C-A8C5-ECC9F3942E4B}">
+                <a14:imgProps xmlns:a14="http://schemas.microsoft.com/office/drawing/2010/main">
+                  <a14:imgLayer r:embed="rId4">
+                    <a14:imgEffect>
+                      <a14:backgroundRemoval t="9867" b="89867" l="6196" r="91630">
+                        <a14:foregroundMark x1="39022" y1="64000" x2="39022" y2="64000"/>
+                        <a14:foregroundMark x1="10000" y1="55200" x2="10000" y2="55200"/>
+                        <a14:foregroundMark x1="6304" y1="63467" x2="6304" y2="63467"/>
+                        <a14:foregroundMark x1="12935" y1="81067" x2="12935" y2="81067"/>
+                        <a14:foregroundMark x1="12500" y1="78933" x2="12500" y2="78933"/>
+                        <a14:foregroundMark x1="13152" y1="78933" x2="13152" y2="78933"/>
+                        <a14:foregroundMark x1="46413" y1="79467" x2="46413" y2="79467"/>
+                        <a14:foregroundMark x1="36630" y1="39200" x2="36630" y2="39200"/>
+                        <a14:foregroundMark x1="36630" y1="38667" x2="36630" y2="38667"/>
+                        <a14:foregroundMark x1="36630" y1="38400" x2="36630" y2="38400"/>
+                        <a14:foregroundMark x1="36630" y1="37867" x2="36630" y2="37867"/>
+                        <a14:foregroundMark x1="36630" y1="37867" x2="36630" y2="37867"/>
+                        <a14:foregroundMark x1="36630" y1="36800" x2="36630" y2="36800"/>
+                        <a14:foregroundMark x1="30109" y1="29067" x2="30109" y2="29067"/>
+                        <a14:foregroundMark x1="30326" y1="29067" x2="30326" y2="29067"/>
+                        <a14:foregroundMark x1="29891" y1="34667" x2="29891" y2="34667"/>
+                        <a14:foregroundMark x1="30109" y1="34667" x2="30109" y2="34667"/>
+                        <a14:foregroundMark x1="30543" y1="35733" x2="30543" y2="35733"/>
+                        <a14:foregroundMark x1="40326" y1="26400" x2="40326" y2="26400"/>
+                        <a14:foregroundMark x1="40761" y1="26400" x2="40761" y2="26400"/>
+                        <a14:foregroundMark x1="40761" y1="33067" x2="40761" y2="33067"/>
+                        <a14:foregroundMark x1="39891" y1="37333" x2="39891" y2="37333"/>
+                        <a14:foregroundMark x1="38261" y1="38667" x2="38261" y2="38667"/>
+                        <a14:foregroundMark x1="44565" y1="22933" x2="44565" y2="22933"/>
+                        <a14:foregroundMark x1="44783" y1="22933" x2="44783" y2="22933"/>
+                        <a14:foregroundMark x1="49130" y1="15733" x2="49130" y2="15733"/>
+                        <a14:foregroundMark x1="54783" y1="22400" x2="54783" y2="22400"/>
+                        <a14:foregroundMark x1="52935" y1="29600" x2="52935" y2="29600"/>
+                        <a14:foregroundMark x1="38043" y1="29600" x2="38043" y2="29600"/>
+                        <a14:foregroundMark x1="67500" y1="26933" x2="67500" y2="26933"/>
+                        <a14:foregroundMark x1="66739" y1="19733" x2="66739" y2="19733"/>
+                        <a14:foregroundMark x1="88043" y1="16800" x2="88043" y2="16800"/>
+                        <a14:foregroundMark x1="84674" y1="16800" x2="84674" y2="16800"/>
+                        <a14:foregroundMark x1="85326" y1="22933" x2="85326" y2="22933"/>
+                        <a14:foregroundMark x1="90326" y1="24800" x2="90326" y2="24800"/>
+                        <a14:foregroundMark x1="91630" y1="18133" x2="91630" y2="18133"/>
+                        <a14:foregroundMark x1="72174" y1="20267" x2="72174" y2="20267"/>
+                        <a14:foregroundMark x1="72935" y1="25867" x2="72935" y2="25867"/>
+                        <a14:foregroundMark x1="52935" y1="17067" x2="52935" y2="17067"/>
+                        <a14:foregroundMark x1="53696" y1="17067" x2="53696" y2="17067"/>
+                        <a14:foregroundMark x1="38696" y1="24800" x2="38696" y2="24800"/>
+                        <a14:foregroundMark x1="17174" y1="20800" x2="17174" y2="20800"/>
+                        <a14:foregroundMark x1="18152" y1="20800" x2="18152" y2="20800"/>
+                        <a14:foregroundMark x1="18804" y1="17600" x2="18804" y2="17600"/>
+                        <a14:foregroundMark x1="18804" y1="16267" x2="18804" y2="16267"/>
+                        <a14:foregroundMark x1="12717" y1="32000" x2="12717" y2="32000"/>
+                        <a14:foregroundMark x1="12500" y1="13067" x2="12500" y2="13067"/>
+                        <a14:foregroundMark x1="12500" y1="12533" x2="12500" y2="12533"/>
+                        <a14:foregroundMark x1="34457" y1="26400" x2="34457" y2="26400"/>
+                        <a14:foregroundMark x1="49130" y1="22933" x2="49130" y2="22933"/>
+                        <a14:foregroundMark x1="67283" y1="17067" x2="67283" y2="17067"/>
+                        <a14:foregroundMark x1="67283" y1="16800" x2="67283" y2="16800"/>
+                        <a14:foregroundMark x1="67283" y1="16267" x2="67283" y2="16267"/>
+                      </a14:backgroundRemoval>
+                    </a14:imgEffect>
+                  </a14:imgLayer>
+                </a14:imgProps>
+              </a:ext>
+            </a:extLst>
+          </a:blip>
+          <a:stretch>
+            <a:fillRect/>
+          </a:stretch>
+        </p:blipFill>
+        <p:spPr>
+          <a:xfrm>
+            <a:off x="424588" y="5481308"/>
+            <a:ext cx="3037028" cy="1234618"/>
+          </a:xfrm>
+          <a:prstGeom prst="rect">
+            <a:avLst/>
+          </a:prstGeom>
+        </p:spPr>
+      </p:pic>
+      <p:sp>
+        <p:nvSpPr>
+          <p:cNvPr id="4" name="Rectangle 3"/>
+          <p:cNvSpPr>
+            <a:spLocks noChangeArrowheads="1"/>
+          </p:cNvSpPr>
+          <p:nvPr/>
+        </p:nvSpPr>
+        <p:spPr bwMode="auto">
+          <a:xfrm>
+            <a:off x="214318" y="914990"/>
+            <a:ext cx="4157657" cy="4401205"/>
+          </a:xfrm>
+          <a:prstGeom prst="rect">
+            <a:avLst/>
+          </a:prstGeom>
+          <a:noFill/>
+          <a:ln w="9525">
+            <a:noFill/>
+            <a:miter lim="800000"/>
+            <a:headEnd/>
+            <a:tailEnd/>
+          </a:ln>
+          <a:effectLst/>
+        </p:spPr>
+        <p:txBody>
+          <a:bodyPr wrap="square">
+            <a:spAutoFit/>
+          </a:bodyPr>
+          <a:lstStyle/>
+          <a:p>
+            <a:pPr>
+              <a:defRPr/>
+            </a:pPr>
+            <a:r>
+              <a:rPr lang="en-US" sz="2000" dirty="0">
+                <a:latin typeface="Avenir"/>
+                <a:cs typeface="Avenir"/>
+              </a:rPr>
+              <a:t>A coroner keeps track of the distributions of two (made-up) tapeworms that occupy the intestines of bodies sent for autopsy. She counts the number of tapeworms with </a:t>
+            </a:r>
+            <a:r>
+              <a:rPr lang="en-US" sz="2000" dirty="0" err="1">
+                <a:latin typeface="Avenir"/>
+                <a:cs typeface="Avenir"/>
+              </a:rPr>
+              <a:t>scolices</a:t>
+            </a:r>
+            <a:r>
+              <a:rPr lang="en-US" sz="2000" dirty="0">
+                <a:latin typeface="Avenir"/>
+                <a:cs typeface="Avenir"/>
+              </a:rPr>
+              <a:t> attached in different sections of the intestinal tract (jejunum -&gt; ileum -&gt; ascending colon -&gt; transverse colon -&gt;descending colon). The table shows the distribution of worms she recovers. </a:t>
+            </a:r>
+            <a:r>
+              <a:rPr lang="en-US" sz="2000" b="1" dirty="0">
+                <a:latin typeface="Avenir"/>
+                <a:cs typeface="Avenir"/>
+              </a:rPr>
+              <a:t>Is there evidence for interspecific competition?</a:t>
+            </a:r>
+          </a:p>
+        </p:txBody>
+      </p:sp>
+      <p:pic>
+        <p:nvPicPr>
+          <p:cNvPr id="8" name="Picture 7">
+            <a:extLst>
+              <a:ext uri="{FF2B5EF4-FFF2-40B4-BE49-F238E27FC236}">
+                <a16:creationId xmlns:a16="http://schemas.microsoft.com/office/drawing/2014/main" id="{ACEC2283-F88C-4349-85F5-205E15ECA033}"/>
+              </a:ext>
+            </a:extLst>
+          </p:cNvPr>
+          <p:cNvPicPr>
+            <a:picLocks noChangeAspect="1"/>
+          </p:cNvPicPr>
+          <p:nvPr/>
+        </p:nvPicPr>
+        <p:blipFill rotWithShape="1">
+          <a:blip r:embed="rId5"/>
+          <a:srcRect l="6456"/>
+          <a:stretch/>
+        </p:blipFill>
+        <p:spPr>
+          <a:xfrm>
+            <a:off x="4486316" y="1328735"/>
+            <a:ext cx="7562803" cy="3500439"/>
+          </a:xfrm>
+          <a:prstGeom prst="rect">
+            <a:avLst/>
+          </a:prstGeom>
+        </p:spPr>
+      </p:pic>
+      <p:sp>
+        <p:nvSpPr>
+          <p:cNvPr id="9" name="Rectangle 8">
+            <a:extLst>
+              <a:ext uri="{FF2B5EF4-FFF2-40B4-BE49-F238E27FC236}">
+                <a16:creationId xmlns:a16="http://schemas.microsoft.com/office/drawing/2014/main" id="{71833D9C-3B5B-7E47-89CD-4D008960CA6E}"/>
+              </a:ext>
+            </a:extLst>
+          </p:cNvPr>
+          <p:cNvSpPr>
+            <a:spLocks noChangeArrowheads="1"/>
+          </p:cNvSpPr>
+          <p:nvPr/>
+        </p:nvSpPr>
+        <p:spPr bwMode="auto">
+          <a:xfrm>
+            <a:off x="3469834" y="5588378"/>
+            <a:ext cx="8485079" cy="1015663"/>
+          </a:xfrm>
+          <a:prstGeom prst="rect">
+            <a:avLst/>
+          </a:prstGeom>
+          <a:noFill/>
+          <a:ln w="9525">
+            <a:noFill/>
+            <a:miter lim="800000"/>
+            <a:headEnd/>
+            <a:tailEnd/>
+          </a:ln>
+          <a:effectLst/>
+        </p:spPr>
+        <p:txBody>
+          <a:bodyPr wrap="square">
+            <a:spAutoFit/>
+          </a:bodyPr>
+          <a:lstStyle/>
+          <a:p>
+            <a:pPr>
+              <a:defRPr/>
+            </a:pPr>
+            <a:r>
+              <a:rPr lang="en-US" sz="3000" b="1" dirty="0">
+                <a:latin typeface="Avenir"/>
+                <a:cs typeface="Avenir"/>
+              </a:rPr>
+              <a:t>Ponder on your own (5 m), discuss with a partner (5 m), then share with the class (5 m).</a:t>
+            </a:r>
+          </a:p>
+        </p:txBody>
+      </p:sp>
+    </p:spTree>
+    <p:extLst>
+      <p:ext uri="{BB962C8B-B14F-4D97-AF65-F5344CB8AC3E}">
+        <p14:creationId xmlns:p14="http://schemas.microsoft.com/office/powerpoint/2010/main" val="2066110785"/>
+      </p:ext>
+    </p:extLst>
+  </p:cSld>
+  <p:clrMapOvr>
+    <a:masterClrMapping/>
+  </p:clrMapOvr>
+  <p:timing>
+    <p:tnLst>
+      <p:par>
+        <p:cTn id="1" dur="indefinite" restart="never" nodeType="tmRoot">
+          <p:childTnLst>
+            <p:seq concurrent="1" nextAc="seek">
+              <p:cTn id="2" dur="indefinite" nodeType="mainSeq">
+                <p:childTnLst>
+                  <p:par>
+                    <p:cTn id="3" fill="hold">
+                      <p:stCondLst>
+                        <p:cond delay="indefinite"/>
+                      </p:stCondLst>
+                      <p:childTnLst>
+                        <p:par>
+                          <p:cTn id="4" fill="hold">
+                            <p:stCondLst>
+                              <p:cond delay="0"/>
+                            </p:stCondLst>
+                            <p:childTnLst>
+                              <p:par>
+                                <p:cTn id="5" presetID="1" presetClass="entr" presetSubtype="0" fill="hold" grpId="0" nodeType="clickEffect">
+                                  <p:stCondLst>
+                                    <p:cond delay="0"/>
+                                  </p:stCondLst>
+                                  <p:childTnLst>
+                                    <p:set>
+                                      <p:cBhvr>
+                                        <p:cTn id="6" dur="1" fill="hold">
+                                          <p:stCondLst>
+                                            <p:cond delay="0"/>
+                                          </p:stCondLst>
+                                        </p:cTn>
+                                        <p:tgtEl>
+                                          <p:spTgt spid="4">
+                                            <p:txEl>
+                                              <p:pRg st="0" end="0"/>
+                                            </p:txEl>
+                                          </p:spTgt>
+                                        </p:tgtEl>
+                                        <p:attrNameLst>
+                                          <p:attrName>style.visibility</p:attrName>
+                                        </p:attrNameLst>
+                                      </p:cBhvr>
+                                      <p:to>
+                                        <p:strVal val="visible"/>
+                                      </p:to>
+                                    </p:set>
+                                  </p:childTnLst>
+                                </p:cTn>
+                              </p:par>
+                            </p:childTnLst>
+                          </p:cTn>
+                        </p:par>
+                      </p:childTnLst>
+                    </p:cTn>
+                  </p:par>
+                </p:childTnLst>
+              </p:cTn>
+              <p:prevCondLst>
+                <p:cond evt="onPrev" delay="0">
+                  <p:tgtEl>
+                    <p:sldTgt/>
+                  </p:tgtEl>
+                </p:cond>
+              </p:prevCondLst>
+              <p:nextCondLst>
+                <p:cond evt="onNext" delay="0">
+                  <p:tgtEl>
+                    <p:sldTgt/>
+                  </p:tgtEl>
+                </p:cond>
+              </p:nextCondLst>
+            </p:seq>
+          </p:childTnLst>
+        </p:cTn>
+      </p:par>
+    </p:tnLst>
+    <p:bldLst>
+      <p:bldP spid="4" grpId="0" uiExpand="1" build="p" bldLvl="5"/>
+    </p:bldLst>
+  </p:timing>
+</p:sld>
+</file>
+
+<file path=ppt/slides/slide11.xml><?xml version="1.0" encoding="utf-8"?>
+<p:sld xmlns:a="http://schemas.openxmlformats.org/drawingml/2006/main" xmlns:r="http://schemas.openxmlformats.org/officeDocument/2006/relationships" xmlns:p="http://schemas.openxmlformats.org/presentationml/2006/main">
+  <p:cSld>
     <p:bg>
       <p:bgPr>
         <a:solidFill>
@@ -5417,7 +5922,7 @@
         </p:blipFill>
         <p:spPr bwMode="auto">
           <a:xfrm>
-            <a:off x="1002777" y="881344"/>
+            <a:off x="1002777" y="778474"/>
             <a:ext cx="4934114" cy="4434067"/>
           </a:xfrm>
           <a:prstGeom prst="rect">
@@ -5514,8 +6019,8 @@
         </p:nvSpPr>
         <p:spPr bwMode="auto">
           <a:xfrm>
-            <a:off x="3469834" y="5545514"/>
-            <a:ext cx="8485079" cy="1015663"/>
+            <a:off x="3469834" y="5316914"/>
+            <a:ext cx="8485079" cy="1477328"/>
           </a:xfrm>
           <a:prstGeom prst="rect">
             <a:avLst/>
@@ -5543,7 +6048,7 @@
                 <a:latin typeface="Avenir"/>
                 <a:cs typeface="Avenir"/>
               </a:rPr>
-              <a:t>Ponder on your own (5 m), discuss with a group (5 m), then share with the class (5 m).</a:t>
+              <a:t>Chelsea will put you into NEW GROUPS for discussion. You’ll write your answers on the board (5 m), then share with the class (5 m).</a:t>
             </a:r>
           </a:p>
         </p:txBody>
@@ -5744,6 +6249,122 @@
   <p:cSld>
     <p:spTree>
       <p:nvGrpSpPr>
+        <p:cNvPr id="1" name="">
+          <a:extLst>
+            <a:ext uri="{FF2B5EF4-FFF2-40B4-BE49-F238E27FC236}">
+              <a16:creationId xmlns:a16="http://schemas.microsoft.com/office/drawing/2014/main" id="{42A455F6-3D0C-EF04-59A4-1738DE7458B4}"/>
+            </a:ext>
+          </a:extLst>
+        </p:cNvPr>
+        <p:cNvGrpSpPr/>
+        <p:nvPr/>
+      </p:nvGrpSpPr>
+      <p:grpSpPr>
+        <a:xfrm>
+          <a:off x="0" y="0"/>
+          <a:ext cx="0" cy="0"/>
+          <a:chOff x="0" y="0"/>
+          <a:chExt cx="0" cy="0"/>
+        </a:xfrm>
+      </p:grpSpPr>
+      <p:sp>
+        <p:nvSpPr>
+          <p:cNvPr id="3" name="Rectangle 2">
+            <a:extLst>
+              <a:ext uri="{FF2B5EF4-FFF2-40B4-BE49-F238E27FC236}">
+                <a16:creationId xmlns:a16="http://schemas.microsoft.com/office/drawing/2014/main" id="{144A0BDB-4EE2-9383-DE78-B20699DC07E5}"/>
+              </a:ext>
+            </a:extLst>
+          </p:cNvPr>
+          <p:cNvSpPr>
+            <a:spLocks noChangeArrowheads="1"/>
+          </p:cNvSpPr>
+          <p:nvPr/>
+        </p:nvSpPr>
+        <p:spPr bwMode="auto">
+          <a:xfrm>
+            <a:off x="271470" y="2322141"/>
+            <a:ext cx="11649060" cy="1323439"/>
+          </a:xfrm>
+          <a:prstGeom prst="rect">
+            <a:avLst/>
+          </a:prstGeom>
+          <a:noFill/>
+          <a:ln w="9525">
+            <a:noFill/>
+            <a:miter lim="800000"/>
+            <a:headEnd/>
+            <a:tailEnd/>
+          </a:ln>
+          <a:effectLst/>
+        </p:spPr>
+        <p:txBody>
+          <a:bodyPr wrap="square">
+            <a:spAutoFit/>
+          </a:bodyPr>
+          <a:lstStyle/>
+          <a:p>
+            <a:pPr algn="ctr">
+              <a:defRPr/>
+            </a:pPr>
+            <a:r>
+              <a:rPr lang="en-US" sz="4000" b="1" dirty="0">
+                <a:latin typeface="Avenir"/>
+                <a:cs typeface="Avenir"/>
+              </a:rPr>
+              <a:t>Q4. Would you rather host an adult or larval tapeworm? Why?</a:t>
+            </a:r>
+          </a:p>
+        </p:txBody>
+      </p:sp>
+      <p:pic>
+        <p:nvPicPr>
+          <p:cNvPr id="2" name="Picture 1">
+            <a:extLst>
+              <a:ext uri="{FF2B5EF4-FFF2-40B4-BE49-F238E27FC236}">
+                <a16:creationId xmlns:a16="http://schemas.microsoft.com/office/drawing/2014/main" id="{968157E6-BC61-6769-9A1E-24C82AE140ED}"/>
+              </a:ext>
+            </a:extLst>
+          </p:cNvPr>
+          <p:cNvPicPr>
+            <a:picLocks noChangeAspect="1"/>
+          </p:cNvPicPr>
+          <p:nvPr/>
+        </p:nvPicPr>
+        <p:blipFill>
+          <a:blip r:embed="rId3"/>
+          <a:stretch>
+            <a:fillRect/>
+          </a:stretch>
+        </p:blipFill>
+        <p:spPr>
+          <a:xfrm>
+            <a:off x="4330700" y="3770505"/>
+            <a:ext cx="3530600" cy="571500"/>
+          </a:xfrm>
+          <a:prstGeom prst="rect">
+            <a:avLst/>
+          </a:prstGeom>
+        </p:spPr>
+      </p:pic>
+    </p:spTree>
+    <p:extLst>
+      <p:ext uri="{BB962C8B-B14F-4D97-AF65-F5344CB8AC3E}">
+        <p14:creationId xmlns:p14="http://schemas.microsoft.com/office/powerpoint/2010/main" val="1187575646"/>
+      </p:ext>
+    </p:extLst>
+  </p:cSld>
+  <p:clrMapOvr>
+    <a:masterClrMapping/>
+  </p:clrMapOvr>
+</p:sld>
+</file>
+
+<file path=ppt/slides/slide9.xml><?xml version="1.0" encoding="utf-8"?>
+<p:sld xmlns:a="http://schemas.openxmlformats.org/drawingml/2006/main" xmlns:r="http://schemas.openxmlformats.org/officeDocument/2006/relationships" xmlns:p="http://schemas.openxmlformats.org/presentationml/2006/main">
+  <p:cSld>
+    <p:spTree>
+      <p:nvGrpSpPr>
         <p:cNvPr id="1" name=""/>
         <p:cNvGrpSpPr/>
         <p:nvPr/>
@@ -5846,402 +6467,6 @@
   <p:clrMapOvr>
     <a:masterClrMapping/>
   </p:clrMapOvr>
-</p:sld>
-</file>
-
-<file path=ppt/slides/slide9.xml><?xml version="1.0" encoding="utf-8"?>
-<p:sld xmlns:a="http://schemas.openxmlformats.org/drawingml/2006/main" xmlns:r="http://schemas.openxmlformats.org/officeDocument/2006/relationships" xmlns:p="http://schemas.openxmlformats.org/presentationml/2006/main">
-  <p:cSld>
-    <p:spTree>
-      <p:nvGrpSpPr>
-        <p:cNvPr id="1" name=""/>
-        <p:cNvGrpSpPr/>
-        <p:nvPr/>
-      </p:nvGrpSpPr>
-      <p:grpSpPr>
-        <a:xfrm>
-          <a:off x="0" y="0"/>
-          <a:ext cx="0" cy="0"/>
-          <a:chOff x="0" y="0"/>
-          <a:chExt cx="0" cy="0"/>
-        </a:xfrm>
-      </p:grpSpPr>
-      <p:sp>
-        <p:nvSpPr>
-          <p:cNvPr id="3" name="Rectangle 2"/>
-          <p:cNvSpPr>
-            <a:spLocks noChangeArrowheads="1"/>
-          </p:cNvSpPr>
-          <p:nvPr/>
-        </p:nvSpPr>
-        <p:spPr bwMode="auto">
-          <a:xfrm>
-            <a:off x="271470" y="190858"/>
-            <a:ext cx="11649060" cy="630942"/>
-          </a:xfrm>
-          <a:prstGeom prst="rect">
-            <a:avLst/>
-          </a:prstGeom>
-          <a:noFill/>
-          <a:ln w="9525">
-            <a:noFill/>
-            <a:miter lim="800000"/>
-            <a:headEnd/>
-            <a:tailEnd/>
-          </a:ln>
-          <a:effectLst/>
-        </p:spPr>
-        <p:txBody>
-          <a:bodyPr wrap="square">
-            <a:spAutoFit/>
-          </a:bodyPr>
-          <a:lstStyle/>
-          <a:p>
-            <a:pPr algn="ctr">
-              <a:defRPr/>
-            </a:pPr>
-            <a:r>
-              <a:rPr lang="en-US" sz="3500" b="1" dirty="0">
-                <a:latin typeface="Avenir"/>
-                <a:cs typeface="Avenir"/>
-              </a:rPr>
-              <a:t>Q5. crowding effects?</a:t>
-            </a:r>
-          </a:p>
-        </p:txBody>
-      </p:sp>
-      <p:pic>
-        <p:nvPicPr>
-          <p:cNvPr id="6" name="Picture 5">
-            <a:extLst>
-              <a:ext uri="{FF2B5EF4-FFF2-40B4-BE49-F238E27FC236}">
-                <a16:creationId xmlns:a16="http://schemas.microsoft.com/office/drawing/2014/main" id="{24C76115-8B07-BF49-9DDC-5F3B697CE12E}"/>
-              </a:ext>
-            </a:extLst>
-          </p:cNvPr>
-          <p:cNvPicPr>
-            <a:picLocks noChangeAspect="1"/>
-          </p:cNvPicPr>
-          <p:nvPr/>
-        </p:nvPicPr>
-        <p:blipFill>
-          <a:blip r:embed="rId3">
-            <a:extLst>
-              <a:ext uri="{BEBA8EAE-BF5A-486C-A8C5-ECC9F3942E4B}">
-                <a14:imgProps xmlns:a14="http://schemas.microsoft.com/office/drawing/2010/main">
-                  <a14:imgLayer r:embed="rId4">
-                    <a14:imgEffect>
-                      <a14:backgroundRemoval t="9867" b="89867" l="6196" r="91630">
-                        <a14:foregroundMark x1="39022" y1="64000" x2="39022" y2="64000"/>
-                        <a14:foregroundMark x1="10000" y1="55200" x2="10000" y2="55200"/>
-                        <a14:foregroundMark x1="6304" y1="63467" x2="6304" y2="63467"/>
-                        <a14:foregroundMark x1="12935" y1="81067" x2="12935" y2="81067"/>
-                        <a14:foregroundMark x1="12500" y1="78933" x2="12500" y2="78933"/>
-                        <a14:foregroundMark x1="13152" y1="78933" x2="13152" y2="78933"/>
-                        <a14:foregroundMark x1="46413" y1="79467" x2="46413" y2="79467"/>
-                        <a14:foregroundMark x1="36630" y1="39200" x2="36630" y2="39200"/>
-                        <a14:foregroundMark x1="36630" y1="38667" x2="36630" y2="38667"/>
-                        <a14:foregroundMark x1="36630" y1="38400" x2="36630" y2="38400"/>
-                        <a14:foregroundMark x1="36630" y1="37867" x2="36630" y2="37867"/>
-                        <a14:foregroundMark x1="36630" y1="37867" x2="36630" y2="37867"/>
-                        <a14:foregroundMark x1="36630" y1="36800" x2="36630" y2="36800"/>
-                        <a14:foregroundMark x1="30109" y1="29067" x2="30109" y2="29067"/>
-                        <a14:foregroundMark x1="30326" y1="29067" x2="30326" y2="29067"/>
-                        <a14:foregroundMark x1="29891" y1="34667" x2="29891" y2="34667"/>
-                        <a14:foregroundMark x1="30109" y1="34667" x2="30109" y2="34667"/>
-                        <a14:foregroundMark x1="30543" y1="35733" x2="30543" y2="35733"/>
-                        <a14:foregroundMark x1="40326" y1="26400" x2="40326" y2="26400"/>
-                        <a14:foregroundMark x1="40761" y1="26400" x2="40761" y2="26400"/>
-                        <a14:foregroundMark x1="40761" y1="33067" x2="40761" y2="33067"/>
-                        <a14:foregroundMark x1="39891" y1="37333" x2="39891" y2="37333"/>
-                        <a14:foregroundMark x1="38261" y1="38667" x2="38261" y2="38667"/>
-                        <a14:foregroundMark x1="44565" y1="22933" x2="44565" y2="22933"/>
-                        <a14:foregroundMark x1="44783" y1="22933" x2="44783" y2="22933"/>
-                        <a14:foregroundMark x1="49130" y1="15733" x2="49130" y2="15733"/>
-                        <a14:foregroundMark x1="54783" y1="22400" x2="54783" y2="22400"/>
-                        <a14:foregroundMark x1="52935" y1="29600" x2="52935" y2="29600"/>
-                        <a14:foregroundMark x1="38043" y1="29600" x2="38043" y2="29600"/>
-                        <a14:foregroundMark x1="67500" y1="26933" x2="67500" y2="26933"/>
-                        <a14:foregroundMark x1="66739" y1="19733" x2="66739" y2="19733"/>
-                        <a14:foregroundMark x1="88043" y1="16800" x2="88043" y2="16800"/>
-                        <a14:foregroundMark x1="84674" y1="16800" x2="84674" y2="16800"/>
-                        <a14:foregroundMark x1="85326" y1="22933" x2="85326" y2="22933"/>
-                        <a14:foregroundMark x1="90326" y1="24800" x2="90326" y2="24800"/>
-                        <a14:foregroundMark x1="91630" y1="18133" x2="91630" y2="18133"/>
-                        <a14:foregroundMark x1="72174" y1="20267" x2="72174" y2="20267"/>
-                        <a14:foregroundMark x1="72935" y1="25867" x2="72935" y2="25867"/>
-                        <a14:foregroundMark x1="52935" y1="17067" x2="52935" y2="17067"/>
-                        <a14:foregroundMark x1="53696" y1="17067" x2="53696" y2="17067"/>
-                        <a14:foregroundMark x1="38696" y1="24800" x2="38696" y2="24800"/>
-                        <a14:foregroundMark x1="17174" y1="20800" x2="17174" y2="20800"/>
-                        <a14:foregroundMark x1="18152" y1="20800" x2="18152" y2="20800"/>
-                        <a14:foregroundMark x1="18804" y1="17600" x2="18804" y2="17600"/>
-                        <a14:foregroundMark x1="18804" y1="16267" x2="18804" y2="16267"/>
-                        <a14:foregroundMark x1="12717" y1="32000" x2="12717" y2="32000"/>
-                        <a14:foregroundMark x1="12500" y1="13067" x2="12500" y2="13067"/>
-                        <a14:foregroundMark x1="12500" y1="12533" x2="12500" y2="12533"/>
-                        <a14:foregroundMark x1="34457" y1="26400" x2="34457" y2="26400"/>
-                        <a14:foregroundMark x1="49130" y1="22933" x2="49130" y2="22933"/>
-                        <a14:foregroundMark x1="67283" y1="17067" x2="67283" y2="17067"/>
-                        <a14:foregroundMark x1="67283" y1="16800" x2="67283" y2="16800"/>
-                        <a14:foregroundMark x1="67283" y1="16267" x2="67283" y2="16267"/>
-                      </a14:backgroundRemoval>
-                    </a14:imgEffect>
-                  </a14:imgLayer>
-                </a14:imgProps>
-              </a:ext>
-            </a:extLst>
-          </a:blip>
-          <a:stretch>
-            <a:fillRect/>
-          </a:stretch>
-        </p:blipFill>
-        <p:spPr>
-          <a:xfrm>
-            <a:off x="424588" y="5481308"/>
-            <a:ext cx="3037028" cy="1234618"/>
-          </a:xfrm>
-          <a:prstGeom prst="rect">
-            <a:avLst/>
-          </a:prstGeom>
-        </p:spPr>
-      </p:pic>
-      <p:sp>
-        <p:nvSpPr>
-          <p:cNvPr id="4" name="Rectangle 3"/>
-          <p:cNvSpPr>
-            <a:spLocks noChangeArrowheads="1"/>
-          </p:cNvSpPr>
-          <p:nvPr/>
-        </p:nvSpPr>
-        <p:spPr bwMode="auto">
-          <a:xfrm>
-            <a:off x="214318" y="914990"/>
-            <a:ext cx="4157657" cy="4401205"/>
-          </a:xfrm>
-          <a:prstGeom prst="rect">
-            <a:avLst/>
-          </a:prstGeom>
-          <a:noFill/>
-          <a:ln w="9525">
-            <a:noFill/>
-            <a:miter lim="800000"/>
-            <a:headEnd/>
-            <a:tailEnd/>
-          </a:ln>
-          <a:effectLst/>
-        </p:spPr>
-        <p:txBody>
-          <a:bodyPr wrap="square">
-            <a:spAutoFit/>
-          </a:bodyPr>
-          <a:lstStyle/>
-          <a:p>
-            <a:pPr>
-              <a:defRPr/>
-            </a:pPr>
-            <a:r>
-              <a:rPr lang="en-US" sz="2000" dirty="0">
-                <a:latin typeface="Avenir"/>
-                <a:cs typeface="Avenir"/>
-              </a:rPr>
-              <a:t>A coroner keeps track of the distributions of two (made-up) tapeworms that occupy the intestines of bodies sent for autopsy. She counts the number of tapeworms with </a:t>
-            </a:r>
-            <a:r>
-              <a:rPr lang="en-US" sz="2000" dirty="0" err="1">
-                <a:latin typeface="Avenir"/>
-                <a:cs typeface="Avenir"/>
-              </a:rPr>
-              <a:t>scolices</a:t>
-            </a:r>
-            <a:r>
-              <a:rPr lang="en-US" sz="2000" dirty="0">
-                <a:latin typeface="Avenir"/>
-                <a:cs typeface="Avenir"/>
-              </a:rPr>
-              <a:t> attached in different sections of the intestinal tract (jejunum -&gt; ileum -&gt; ascending colon -&gt; transverse colon -&gt;descending colon). The table shows the distribution of worms she recovers. </a:t>
-            </a:r>
-            <a:r>
-              <a:rPr lang="en-US" sz="2000" b="1" dirty="0">
-                <a:latin typeface="Avenir"/>
-                <a:cs typeface="Avenir"/>
-              </a:rPr>
-              <a:t>Is there evidence for interspecific competition?</a:t>
-            </a:r>
-          </a:p>
-        </p:txBody>
-      </p:sp>
-      <p:pic>
-        <p:nvPicPr>
-          <p:cNvPr id="8" name="Picture 7">
-            <a:extLst>
-              <a:ext uri="{FF2B5EF4-FFF2-40B4-BE49-F238E27FC236}">
-                <a16:creationId xmlns:a16="http://schemas.microsoft.com/office/drawing/2014/main" id="{ACEC2283-F88C-4349-85F5-205E15ECA033}"/>
-              </a:ext>
-            </a:extLst>
-          </p:cNvPr>
-          <p:cNvPicPr>
-            <a:picLocks noChangeAspect="1"/>
-          </p:cNvPicPr>
-          <p:nvPr/>
-        </p:nvPicPr>
-        <p:blipFill rotWithShape="1">
-          <a:blip r:embed="rId5"/>
-          <a:srcRect l="6456"/>
-          <a:stretch/>
-        </p:blipFill>
-        <p:spPr>
-          <a:xfrm>
-            <a:off x="4486316" y="1328735"/>
-            <a:ext cx="7562803" cy="3500439"/>
-          </a:xfrm>
-          <a:prstGeom prst="rect">
-            <a:avLst/>
-          </a:prstGeom>
-        </p:spPr>
-      </p:pic>
-      <p:sp>
-        <p:nvSpPr>
-          <p:cNvPr id="9" name="Rectangle 8">
-            <a:extLst>
-              <a:ext uri="{FF2B5EF4-FFF2-40B4-BE49-F238E27FC236}">
-                <a16:creationId xmlns:a16="http://schemas.microsoft.com/office/drawing/2014/main" id="{71833D9C-3B5B-7E47-89CD-4D008960CA6E}"/>
-              </a:ext>
-            </a:extLst>
-          </p:cNvPr>
-          <p:cNvSpPr>
-            <a:spLocks noChangeArrowheads="1"/>
-          </p:cNvSpPr>
-          <p:nvPr/>
-        </p:nvSpPr>
-        <p:spPr bwMode="auto">
-          <a:xfrm>
-            <a:off x="3469834" y="5588378"/>
-            <a:ext cx="8485079" cy="1015663"/>
-          </a:xfrm>
-          <a:prstGeom prst="rect">
-            <a:avLst/>
-          </a:prstGeom>
-          <a:noFill/>
-          <a:ln w="9525">
-            <a:noFill/>
-            <a:miter lim="800000"/>
-            <a:headEnd/>
-            <a:tailEnd/>
-          </a:ln>
-          <a:effectLst/>
-        </p:spPr>
-        <p:txBody>
-          <a:bodyPr wrap="square">
-            <a:spAutoFit/>
-          </a:bodyPr>
-          <a:lstStyle/>
-          <a:p>
-            <a:pPr>
-              <a:defRPr/>
-            </a:pPr>
-            <a:r>
-              <a:rPr lang="en-US" sz="3000" b="1" dirty="0">
-                <a:latin typeface="Avenir"/>
-                <a:cs typeface="Avenir"/>
-              </a:rPr>
-              <a:t>Ponder on your own (5 m), discuss with a partner (5 m), then share with the class (5 m).</a:t>
-            </a:r>
-          </a:p>
-        </p:txBody>
-      </p:sp>
-    </p:spTree>
-    <p:extLst>
-      <p:ext uri="{BB962C8B-B14F-4D97-AF65-F5344CB8AC3E}">
-        <p14:creationId xmlns:p14="http://schemas.microsoft.com/office/powerpoint/2010/main" val="2066110785"/>
-      </p:ext>
-    </p:extLst>
-  </p:cSld>
-  <p:clrMapOvr>
-    <a:masterClrMapping/>
-  </p:clrMapOvr>
-  <p:timing>
-    <p:tnLst>
-      <p:par>
-        <p:cTn id="1" dur="indefinite" restart="never" nodeType="tmRoot">
-          <p:childTnLst>
-            <p:seq concurrent="1" nextAc="seek">
-              <p:cTn id="2" dur="indefinite" nodeType="mainSeq">
-                <p:childTnLst>
-                  <p:par>
-                    <p:cTn id="3" fill="hold">
-                      <p:stCondLst>
-                        <p:cond delay="indefinite"/>
-                      </p:stCondLst>
-                      <p:childTnLst>
-                        <p:par>
-                          <p:cTn id="4" fill="hold">
-                            <p:stCondLst>
-                              <p:cond delay="0"/>
-                            </p:stCondLst>
-                            <p:childTnLst>
-                              <p:par>
-                                <p:cTn id="5" presetID="1" presetClass="entr" presetSubtype="0" fill="hold" grpId="0" nodeType="clickEffect">
-                                  <p:stCondLst>
-                                    <p:cond delay="0"/>
-                                  </p:stCondLst>
-                                  <p:childTnLst>
-                                    <p:set>
-                                      <p:cBhvr>
-                                        <p:cTn id="6" dur="1" fill="hold">
-                                          <p:stCondLst>
-                                            <p:cond delay="0"/>
-                                          </p:stCondLst>
-                                        </p:cTn>
-                                        <p:tgtEl>
-                                          <p:spTgt spid="4">
-                                            <p:txEl>
-                                              <p:pRg st="0" end="0"/>
-                                            </p:txEl>
-                                          </p:spTgt>
-                                        </p:tgtEl>
-                                        <p:attrNameLst>
-                                          <p:attrName>style.visibility</p:attrName>
-                                        </p:attrNameLst>
-                                      </p:cBhvr>
-                                      <p:to>
-                                        <p:strVal val="visible"/>
-                                      </p:to>
-                                    </p:set>
-                                  </p:childTnLst>
-                                </p:cTn>
-                              </p:par>
-                            </p:childTnLst>
-                          </p:cTn>
-                        </p:par>
-                      </p:childTnLst>
-                    </p:cTn>
-                  </p:par>
-                </p:childTnLst>
-              </p:cTn>
-              <p:prevCondLst>
-                <p:cond evt="onPrev" delay="0">
-                  <p:tgtEl>
-                    <p:sldTgt/>
-                  </p:tgtEl>
-                </p:cond>
-              </p:prevCondLst>
-              <p:nextCondLst>
-                <p:cond evt="onNext" delay="0">
-                  <p:tgtEl>
-                    <p:sldTgt/>
-                  </p:tgtEl>
-                </p:cond>
-              </p:nextCondLst>
-            </p:seq>
-          </p:childTnLst>
-        </p:cTn>
-      </p:par>
-    </p:tnLst>
-    <p:bldLst>
-      <p:bldP spid="4" grpId="0" uiExpand="1" build="p" bldLvl="5"/>
-    </p:bldLst>
-  </p:timing>
 </p:sld>
 </file>
 
